--- a/docs/architecture/azureops_gitops_architecture.pptx
+++ b/docs/architecture/azureops_gitops_architecture.pptx
@@ -3169,7 +3169,7 @@
               </a:defRPr>
             </a:pPr>
             <a:r>
-              <a:t>AZUREOPS SENTINEL</a:t>
+              <a:t>CLOUDSECAIOPS</a:t>
             </a:r>
           </a:p>
           <a:p>
